--- a/non_website_content/conferences/2026/CAMIS poster 2026.pptx
+++ b/non_website_content/conferences/2026/CAMIS poster 2026.pptx
@@ -173,31 +173,31 @@
 </p188:authorLst>
 </file>
 
-<file path=ppt/revisionInfo.xml><?xml version="1.0" encoding="utf-8"?>
-<p1510:revInfo xmlns:a="http://schemas.openxmlformats.org/drawingml/2006/main" xmlns:r="http://schemas.openxmlformats.org/officeDocument/2006/relationships" xmlns:p1510="http://schemas.microsoft.com/office/powerpoint/2015/10/main">
-  <p1510:revLst>
-    <p1510:client id="{36082AF8-2115-4B94-89AB-CA141E823867}" v="2" dt="2026-04-08T07:25:18.392"/>
-  </p1510:revLst>
-</p1510:revInfo>
-</file>
-
 <file path=ppt/changesInfos/changesInfo1.xml><?xml version="1.0" encoding="utf-8"?>
 <pc:chgInfo xmlns:a="http://schemas.openxmlformats.org/drawingml/2006/main" xmlns:r="http://schemas.openxmlformats.org/officeDocument/2006/relationships" xmlns:ac="http://schemas.microsoft.com/office/drawing/2013/main/command" xmlns:pc="http://schemas.microsoft.com/office/powerpoint/2013/main/command">
   <pc:docChgLst>
     <pc:chgData name="Taylor, Lyn" userId="c7edfcec-8e1b-44a5-b320-97a8b99570dc" providerId="ADAL" clId="{ADBD5F59-7256-4788-A82B-3AD03D0BC317}"/>
-    <pc:docChg chg="modSld">
-      <pc:chgData name="Taylor, Lyn" userId="c7edfcec-8e1b-44a5-b320-97a8b99570dc" providerId="ADAL" clId="{ADBD5F59-7256-4788-A82B-3AD03D0BC317}" dt="2026-04-08T07:28:24.039" v="116" actId="6549"/>
+    <pc:docChg chg="custSel modSld">
+      <pc:chgData name="Taylor, Lyn" userId="c7edfcec-8e1b-44a5-b320-97a8b99570dc" providerId="ADAL" clId="{ADBD5F59-7256-4788-A82B-3AD03D0BC317}" dt="2026-04-15T08:56:32.827" v="232" actId="20577"/>
       <pc:docMkLst>
         <pc:docMk/>
       </pc:docMkLst>
-      <pc:sldChg chg="modSp mod">
-        <pc:chgData name="Taylor, Lyn" userId="c7edfcec-8e1b-44a5-b320-97a8b99570dc" providerId="ADAL" clId="{ADBD5F59-7256-4788-A82B-3AD03D0BC317}" dt="2026-04-08T07:28:24.039" v="116" actId="6549"/>
+      <pc:sldChg chg="addSp delSp modSp mod">
+        <pc:chgData name="Taylor, Lyn" userId="c7edfcec-8e1b-44a5-b320-97a8b99570dc" providerId="ADAL" clId="{ADBD5F59-7256-4788-A82B-3AD03D0BC317}" dt="2026-04-15T08:56:32.827" v="232" actId="20577"/>
         <pc:sldMkLst>
           <pc:docMk/>
           <pc:sldMk cId="4200912602" sldId="306"/>
         </pc:sldMkLst>
         <pc:spChg chg="mod">
-          <ac:chgData name="Taylor, Lyn" userId="c7edfcec-8e1b-44a5-b320-97a8b99570dc" providerId="ADAL" clId="{ADBD5F59-7256-4788-A82B-3AD03D0BC317}" dt="2026-04-08T07:26:13.274" v="32" actId="948"/>
+          <ac:chgData name="Taylor, Lyn" userId="c7edfcec-8e1b-44a5-b320-97a8b99570dc" providerId="ADAL" clId="{ADBD5F59-7256-4788-A82B-3AD03D0BC317}" dt="2026-04-15T08:12:41.909" v="154" actId="20577"/>
+          <ac:spMkLst>
+            <pc:docMk/>
+            <pc:sldMk cId="4200912602" sldId="306"/>
+            <ac:spMk id="14" creationId="{FA3BE196-BFDE-791F-E0BB-A87B66CC3BA2}"/>
+          </ac:spMkLst>
+        </pc:spChg>
+        <pc:spChg chg="mod">
+          <ac:chgData name="Taylor, Lyn" userId="c7edfcec-8e1b-44a5-b320-97a8b99570dc" providerId="ADAL" clId="{ADBD5F59-7256-4788-A82B-3AD03D0BC317}" dt="2026-04-15T08:56:32.827" v="232" actId="20577"/>
           <ac:spMkLst>
             <pc:docMk/>
             <pc:sldMk cId="4200912602" sldId="306"/>
@@ -228,6 +228,22 @@
             <ac:graphicFrameMk id="22" creationId="{CA4886C8-B408-61B0-96E4-D447572177FB}"/>
           </ac:graphicFrameMkLst>
         </pc:graphicFrameChg>
+        <pc:picChg chg="add mod">
+          <ac:chgData name="Taylor, Lyn" userId="c7edfcec-8e1b-44a5-b320-97a8b99570dc" providerId="ADAL" clId="{ADBD5F59-7256-4788-A82B-3AD03D0BC317}" dt="2026-04-15T08:10:27.563" v="120" actId="14100"/>
+          <ac:picMkLst>
+            <pc:docMk/>
+            <pc:sldMk cId="4200912602" sldId="306"/>
+            <ac:picMk id="6" creationId="{9765F916-8ED0-FE72-2C3F-1B28BA7E4AA3}"/>
+          </ac:picMkLst>
+        </pc:picChg>
+        <pc:picChg chg="del">
+          <ac:chgData name="Taylor, Lyn" userId="c7edfcec-8e1b-44a5-b320-97a8b99570dc" providerId="ADAL" clId="{ADBD5F59-7256-4788-A82B-3AD03D0BC317}" dt="2026-04-15T08:10:09.804" v="117" actId="478"/>
+          <ac:picMkLst>
+            <pc:docMk/>
+            <pc:sldMk cId="4200912602" sldId="306"/>
+            <ac:picMk id="153" creationId="{A3652896-2307-A65E-8E17-51D873F3B43F}"/>
+          </ac:picMkLst>
+        </pc:picChg>
       </pc:sldChg>
     </pc:docChg>
   </pc:docChgLst>
@@ -332,7 +348,7 @@
               <a:rPr lang="en-US" smtClean="0">
                 <a:latin typeface="Arial" panose="020B0604020202020204" pitchFamily="34" charset="0"/>
               </a:rPr>
-              <a:t>4/8/2026</a:t>
+              <a:t>4/15/2026</a:t>
             </a:fld>
             <a:endParaRPr lang="en-US">
               <a:latin typeface="Arial" panose="020B0604020202020204" pitchFamily="34" charset="0"/>
@@ -522,7 +538,7 @@
             <a:fld id="{110AAC2C-0086-BD4A-96CB-5B53248D5F36}" type="datetimeFigureOut">
               <a:rPr lang="en-US" smtClean="0"/>
               <a:pPr/>
-              <a:t>4/8/2026</a:t>
+              <a:t>4/15/2026</a:t>
             </a:fld>
             <a:endParaRPr lang="en-US"/>
           </a:p>
@@ -2014,7 +2030,7 @@
           </a:p>
           <a:p>
             <a:pPr marL="1695450"/>
-            <a:endParaRPr lang="en-US" sz="6000" b="1" dirty="0">
+            <a:endParaRPr lang="en-US" sz="3200" b="1" dirty="0">
               <a:solidFill>
                 <a:schemeClr val="bg1"/>
               </a:solidFill>
@@ -2028,7 +2044,7 @@
                   <a:schemeClr val="bg1"/>
                 </a:solidFill>
               </a:rPr>
-              <a:t>Martin Brown (</a:t>
+              <a:t>Martin Brown (PPD, Part of </a:t>
             </a:r>
             <a:r>
               <a:rPr lang="en-US" sz="3200" dirty="0" err="1">
@@ -2036,7 +2052,7 @@
                   <a:schemeClr val="bg1"/>
                 </a:solidFill>
               </a:rPr>
-              <a:t>Thermofisher</a:t>
+              <a:t>Thermo</a:t>
             </a:r>
             <a:r>
               <a:rPr lang="en-US" sz="3200" dirty="0">
@@ -2044,7 +2060,22 @@
                   <a:schemeClr val="bg1"/>
                 </a:solidFill>
               </a:rPr>
-              <a:t>, UK), Lyn Taylor (Parexel, UK), Christina E Fillmore (GSK, UK) &amp; Yannick Vandendijck (Johnson &amp; Johnson, Belgium)</a:t>
+              <a:t> Fisher Scientific, UK), Lyn Taylor (Parexel, UK), Christina E Fillmore (GSK, UK) &amp; </a:t>
+            </a:r>
+            <a:br>
+              <a:rPr lang="en-US" sz="3200" dirty="0">
+                <a:solidFill>
+                  <a:schemeClr val="bg1"/>
+                </a:solidFill>
+              </a:rPr>
+            </a:br>
+            <a:r>
+              <a:rPr lang="en-US" sz="3200" dirty="0">
+                <a:solidFill>
+                  <a:schemeClr val="bg1"/>
+                </a:solidFill>
+              </a:rPr>
+              <a:t>Yannick Vandendijck (Johnson &amp; Johnson, Belgium)</a:t>
             </a:r>
           </a:p>
           <a:p>
@@ -2081,7 +2112,7 @@
                   <a:schemeClr val="bg1"/>
                 </a:solidFill>
               </a:rPr>
-              <a:t>CAMIS: Comparing Analysis Method Implementations in Software:</a:t>
+              <a:t>CAMIS: Comparing Analysis Method Implementations in Software</a:t>
             </a:r>
             <a:endParaRPr lang="en-GB" b="1" dirty="0">
               <a:solidFill>
@@ -2210,6 +2241,16 @@
               <a:buChar char="•"/>
             </a:pPr>
             <a:r>
+              <a:rPr lang="en-US" sz="3600" kern="100">
+                <a:solidFill>
+                  <a:srgbClr val="002060"/>
+                </a:solidFill>
+                <a:ea typeface="Aptos" panose="020B0004020202020204" pitchFamily="34" charset="0"/>
+                <a:cs typeface="Times New Roman" panose="02020603050405020304" pitchFamily="18" charset="0"/>
+              </a:rPr>
+              <a:t>Explain </a:t>
+            </a:r>
+            <a:r>
               <a:rPr lang="en-US" sz="3600" kern="100" dirty="0">
                 <a:solidFill>
                   <a:srgbClr val="002060"/>
@@ -2217,7 +2258,7 @@
                 <a:ea typeface="Aptos" panose="020B0004020202020204" pitchFamily="34" charset="0"/>
                 <a:cs typeface="Times New Roman" panose="02020603050405020304" pitchFamily="18" charset="0"/>
               </a:rPr>
-              <a:t>Document why </a:t>
+              <a:t>why </a:t>
             </a:r>
             <a:r>
               <a:rPr lang="en-US" sz="3600" kern="100" dirty="0">
@@ -2228,11 +2269,33 @@
                 <a:ea typeface="Aptos" panose="020B0004020202020204" pitchFamily="34" charset="0"/>
                 <a:cs typeface="Times New Roman" panose="02020603050405020304" pitchFamily="18" charset="0"/>
               </a:rPr>
-              <a:t>analyses method results differ or provide solutions to make them align (including R package selection)</a:t>
+              <a:t>analysis results differ, when using different software (or different R </a:t>
+            </a:r>
+            <a:r>
+              <a:rPr lang="en-US" sz="3600" kern="100">
+                <a:solidFill>
+                  <a:srgbClr val="002060"/>
+                </a:solidFill>
+                <a:latin typeface="+mj-lt"/>
+                <a:ea typeface="Aptos" panose="020B0004020202020204" pitchFamily="34" charset="0"/>
+                <a:cs typeface="Times New Roman" panose="02020603050405020304" pitchFamily="18" charset="0"/>
+              </a:rPr>
+              <a:t>packages), </a:t>
+            </a:r>
+            <a:r>
+              <a:rPr lang="en-US" sz="3600" kern="100" dirty="0">
+                <a:solidFill>
+                  <a:srgbClr val="002060"/>
+                </a:solidFill>
+                <a:latin typeface="+mj-lt"/>
+                <a:ea typeface="Aptos" panose="020B0004020202020204" pitchFamily="34" charset="0"/>
+                <a:cs typeface="Times New Roman" panose="02020603050405020304" pitchFamily="18" charset="0"/>
+              </a:rPr>
+              <a:t>or provide solutions to make them align</a:t>
             </a:r>
           </a:p>
           <a:p>
-            <a:pPr marL="571500" indent="-571500">
+            <a:pPr marL="571500" indent="-571500" algn="just">
               <a:lnSpc>
                 <a:spcPct val="115000"/>
               </a:lnSpc>
@@ -7771,36 +7834,6 @@
           </p:style>
         </p:cxnSp>
       </p:grpSp>
-      <p:pic>
-        <p:nvPicPr>
-          <p:cNvPr id="153" name="Picture 152">
-            <a:extLst>
-              <a:ext uri="{FF2B5EF4-FFF2-40B4-BE49-F238E27FC236}">
-                <a16:creationId xmlns:a16="http://schemas.microsoft.com/office/drawing/2014/main" id="{A3652896-2307-A65E-8E17-51D873F3B43F}"/>
-              </a:ext>
-            </a:extLst>
-          </p:cNvPr>
-          <p:cNvPicPr>
-            <a:picLocks noChangeAspect="1"/>
-          </p:cNvPicPr>
-          <p:nvPr/>
-        </p:nvPicPr>
-        <p:blipFill>
-          <a:blip r:embed="rId15"/>
-          <a:stretch>
-            <a:fillRect/>
-          </a:stretch>
-        </p:blipFill>
-        <p:spPr>
-          <a:xfrm>
-            <a:off x="9290698" y="28642889"/>
-            <a:ext cx="1979223" cy="1990374"/>
-          </a:xfrm>
-          <a:prstGeom prst="rect">
-            <a:avLst/>
-          </a:prstGeom>
-        </p:spPr>
-      </p:pic>
       <p:sp>
         <p:nvSpPr>
           <p:cNvPr id="159" name="TextBox 158">
@@ -7883,10 +7916,10 @@
             <p:nvPr/>
           </p:nvPicPr>
           <p:blipFill>
-            <a:blip r:embed="rId16">
+            <a:blip r:embed="rId15">
               <a:extLst>
                 <a:ext uri="{96DAC541-7B7A-43D3-8B79-37D633B846F1}">
-                  <asvg:svgBlip xmlns:asvg="http://schemas.microsoft.com/office/drawing/2016/SVG/main" r:embed="rId17"/>
+                  <asvg:svgBlip xmlns:asvg="http://schemas.microsoft.com/office/drawing/2016/SVG/main" r:embed="rId16"/>
                 </a:ext>
               </a:extLst>
             </a:blip>
@@ -8580,7 +8613,7 @@
           <p:nvPr/>
         </p:nvPicPr>
         <p:blipFill>
-          <a:blip r:embed="rId18"/>
+          <a:blip r:embed="rId17"/>
           <a:stretch>
             <a:fillRect/>
           </a:stretch>
@@ -8589,6 +8622,36 @@
           <a:xfrm>
             <a:off x="512135" y="37227286"/>
             <a:ext cx="4001058" cy="2753109"/>
+          </a:xfrm>
+          <a:prstGeom prst="rect">
+            <a:avLst/>
+          </a:prstGeom>
+        </p:spPr>
+      </p:pic>
+      <p:pic>
+        <p:nvPicPr>
+          <p:cNvPr id="6" name="Picture 5">
+            <a:extLst>
+              <a:ext uri="{FF2B5EF4-FFF2-40B4-BE49-F238E27FC236}">
+                <a16:creationId xmlns:a16="http://schemas.microsoft.com/office/drawing/2014/main" id="{9765F916-8ED0-FE72-2C3F-1B28BA7E4AA3}"/>
+              </a:ext>
+            </a:extLst>
+          </p:cNvPr>
+          <p:cNvPicPr>
+            <a:picLocks noChangeAspect="1"/>
+          </p:cNvPicPr>
+          <p:nvPr/>
+        </p:nvPicPr>
+        <p:blipFill>
+          <a:blip r:embed="rId18"/>
+          <a:stretch>
+            <a:fillRect/>
+          </a:stretch>
+        </p:blipFill>
+        <p:spPr>
+          <a:xfrm>
+            <a:off x="8923432" y="28580065"/>
+            <a:ext cx="2176367" cy="2176367"/>
           </a:xfrm>
           <a:prstGeom prst="rect">
             <a:avLst/>

--- a/non_website_content/conferences/2026/CAMIS poster 2026.pptx
+++ b/non_website_content/conferences/2026/CAMIS poster 2026.pptx
@@ -173,83 +173,6 @@
 </p188:authorLst>
 </file>
 
-<file path=ppt/changesInfos/changesInfo1.xml><?xml version="1.0" encoding="utf-8"?>
-<pc:chgInfo xmlns:a="http://schemas.openxmlformats.org/drawingml/2006/main" xmlns:r="http://schemas.openxmlformats.org/officeDocument/2006/relationships" xmlns:ac="http://schemas.microsoft.com/office/drawing/2013/main/command" xmlns:pc="http://schemas.microsoft.com/office/powerpoint/2013/main/command">
-  <pc:docChgLst>
-    <pc:chgData name="Taylor, Lyn" userId="c7edfcec-8e1b-44a5-b320-97a8b99570dc" providerId="ADAL" clId="{ADBD5F59-7256-4788-A82B-3AD03D0BC317}"/>
-    <pc:docChg chg="custSel modSld">
-      <pc:chgData name="Taylor, Lyn" userId="c7edfcec-8e1b-44a5-b320-97a8b99570dc" providerId="ADAL" clId="{ADBD5F59-7256-4788-A82B-3AD03D0BC317}" dt="2026-04-15T08:56:32.827" v="232" actId="20577"/>
-      <pc:docMkLst>
-        <pc:docMk/>
-      </pc:docMkLst>
-      <pc:sldChg chg="addSp delSp modSp mod">
-        <pc:chgData name="Taylor, Lyn" userId="c7edfcec-8e1b-44a5-b320-97a8b99570dc" providerId="ADAL" clId="{ADBD5F59-7256-4788-A82B-3AD03D0BC317}" dt="2026-04-15T08:56:32.827" v="232" actId="20577"/>
-        <pc:sldMkLst>
-          <pc:docMk/>
-          <pc:sldMk cId="4200912602" sldId="306"/>
-        </pc:sldMkLst>
-        <pc:spChg chg="mod">
-          <ac:chgData name="Taylor, Lyn" userId="c7edfcec-8e1b-44a5-b320-97a8b99570dc" providerId="ADAL" clId="{ADBD5F59-7256-4788-A82B-3AD03D0BC317}" dt="2026-04-15T08:12:41.909" v="154" actId="20577"/>
-          <ac:spMkLst>
-            <pc:docMk/>
-            <pc:sldMk cId="4200912602" sldId="306"/>
-            <ac:spMk id="14" creationId="{FA3BE196-BFDE-791F-E0BB-A87B66CC3BA2}"/>
-          </ac:spMkLst>
-        </pc:spChg>
-        <pc:spChg chg="mod">
-          <ac:chgData name="Taylor, Lyn" userId="c7edfcec-8e1b-44a5-b320-97a8b99570dc" providerId="ADAL" clId="{ADBD5F59-7256-4788-A82B-3AD03D0BC317}" dt="2026-04-15T08:56:32.827" v="232" actId="20577"/>
-          <ac:spMkLst>
-            <pc:docMk/>
-            <pc:sldMk cId="4200912602" sldId="306"/>
-            <ac:spMk id="16" creationId="{C30D1C3A-5902-4BD6-A700-8F8A44C674D0}"/>
-          </ac:spMkLst>
-        </pc:spChg>
-        <pc:spChg chg="mod">
-          <ac:chgData name="Taylor, Lyn" userId="c7edfcec-8e1b-44a5-b320-97a8b99570dc" providerId="ADAL" clId="{ADBD5F59-7256-4788-A82B-3AD03D0BC317}" dt="2026-04-08T07:28:24.039" v="116" actId="6549"/>
-          <ac:spMkLst>
-            <pc:docMk/>
-            <pc:sldMk cId="4200912602" sldId="306"/>
-            <ac:spMk id="23" creationId="{A25992C1-CDE7-6A00-BFA7-3372495A756A}"/>
-          </ac:spMkLst>
-        </pc:spChg>
-        <pc:spChg chg="mod">
-          <ac:chgData name="Taylor, Lyn" userId="c7edfcec-8e1b-44a5-b320-97a8b99570dc" providerId="ADAL" clId="{ADBD5F59-7256-4788-A82B-3AD03D0BC317}" dt="2026-04-08T07:25:13.695" v="24" actId="14100"/>
-          <ac:spMkLst>
-            <pc:docMk/>
-            <pc:sldMk cId="4200912602" sldId="306"/>
-            <ac:spMk id="27" creationId="{8E9A3304-1548-88AC-EF27-99739732FA93}"/>
-          </ac:spMkLst>
-        </pc:spChg>
-        <pc:graphicFrameChg chg="modGraphic">
-          <ac:chgData name="Taylor, Lyn" userId="c7edfcec-8e1b-44a5-b320-97a8b99570dc" providerId="ADAL" clId="{ADBD5F59-7256-4788-A82B-3AD03D0BC317}" dt="2026-04-08T07:23:47.761" v="0" actId="13926"/>
-          <ac:graphicFrameMkLst>
-            <pc:docMk/>
-            <pc:sldMk cId="4200912602" sldId="306"/>
-            <ac:graphicFrameMk id="22" creationId="{CA4886C8-B408-61B0-96E4-D447572177FB}"/>
-          </ac:graphicFrameMkLst>
-        </pc:graphicFrameChg>
-        <pc:picChg chg="add mod">
-          <ac:chgData name="Taylor, Lyn" userId="c7edfcec-8e1b-44a5-b320-97a8b99570dc" providerId="ADAL" clId="{ADBD5F59-7256-4788-A82B-3AD03D0BC317}" dt="2026-04-15T08:10:27.563" v="120" actId="14100"/>
-          <ac:picMkLst>
-            <pc:docMk/>
-            <pc:sldMk cId="4200912602" sldId="306"/>
-            <ac:picMk id="6" creationId="{9765F916-8ED0-FE72-2C3F-1B28BA7E4AA3}"/>
-          </ac:picMkLst>
-        </pc:picChg>
-        <pc:picChg chg="del">
-          <ac:chgData name="Taylor, Lyn" userId="c7edfcec-8e1b-44a5-b320-97a8b99570dc" providerId="ADAL" clId="{ADBD5F59-7256-4788-A82B-3AD03D0BC317}" dt="2026-04-15T08:10:09.804" v="117" actId="478"/>
-          <ac:picMkLst>
-            <pc:docMk/>
-            <pc:sldMk cId="4200912602" sldId="306"/>
-            <ac:picMk id="153" creationId="{A3652896-2307-A65E-8E17-51D873F3B43F}"/>
-          </ac:picMkLst>
-        </pc:picChg>
-      </pc:sldChg>
-    </pc:docChg>
-  </pc:docChgLst>
-</pc:chgInfo>
-</file>
-
 <file path=ppt/handoutMasters/handoutMaster1.xml><?xml version="1.0" encoding="utf-8"?>
 <p:handoutMaster xmlns:a="http://schemas.openxmlformats.org/drawingml/2006/main" xmlns:r="http://schemas.openxmlformats.org/officeDocument/2006/relationships" xmlns:p="http://schemas.openxmlformats.org/presentationml/2006/main">
   <p:cSld>
@@ -348,7 +271,7 @@
               <a:rPr lang="en-US" smtClean="0">
                 <a:latin typeface="Arial" panose="020B0604020202020204" pitchFamily="34" charset="0"/>
               </a:rPr>
-              <a:t>4/15/2026</a:t>
+              <a:t>4/16/2026</a:t>
             </a:fld>
             <a:endParaRPr lang="en-US">
               <a:latin typeface="Arial" panose="020B0604020202020204" pitchFamily="34" charset="0"/>
@@ -538,7 +461,7 @@
             <a:fld id="{110AAC2C-0086-BD4A-96CB-5B53248D5F36}" type="datetimeFigureOut">
               <a:rPr lang="en-US" smtClean="0"/>
               <a:pPr/>
-              <a:t>4/15/2026</a:t>
+              <a:t>4/16/2026</a:t>
             </a:fld>
             <a:endParaRPr lang="en-US"/>
           </a:p>
@@ -1876,10 +1799,10 @@
           <p:nvPr/>
         </p:nvPicPr>
         <p:blipFill>
-          <a:blip r:embed="rId2">
+          <a:blip>
             <a:extLst>
               <a:ext uri="{96DAC541-7B7A-43D3-8B79-37D633B846F1}">
-                <asvg:svgBlip xmlns:asvg="http://schemas.microsoft.com/office/drawing/2016/SVG/main" r:embed="rId3"/>
+                <asvg:svgBlip xmlns:asvg="http://schemas.microsoft.com/office/drawing/2016/SVG/main" r:embed="rId2"/>
               </a:ext>
             </a:extLst>
           </a:blip>
@@ -1912,10 +1835,10 @@
           <p:nvPr/>
         </p:nvPicPr>
         <p:blipFill>
-          <a:blip r:embed="rId4">
+          <a:blip>
             <a:extLst>
               <a:ext uri="{96DAC541-7B7A-43D3-8B79-37D633B846F1}">
-                <asvg:svgBlip xmlns:asvg="http://schemas.microsoft.com/office/drawing/2016/SVG/main" r:embed="rId5"/>
+                <asvg:svgBlip xmlns:asvg="http://schemas.microsoft.com/office/drawing/2016/SVG/main" r:embed="rId3"/>
               </a:ext>
             </a:extLst>
           </a:blip>
@@ -1948,7 +1871,7 @@
           <p:nvPr/>
         </p:nvPicPr>
         <p:blipFill>
-          <a:blip r:embed="rId6"/>
+          <a:blip r:embed="rId4"/>
           <a:stretch>
             <a:fillRect/>
           </a:stretch>
@@ -2376,7 +2299,7 @@
           <p:nvPr/>
         </p:nvPicPr>
         <p:blipFill>
-          <a:blip r:embed="rId7"/>
+          <a:blip r:embed="rId5"/>
           <a:stretch>
             <a:fillRect/>
           </a:stretch>
@@ -2406,7 +2329,7 @@
           <p:nvPr>
             <p:extLst>
               <p:ext uri="{D42A27DB-BD31-4B8C-83A1-F6EECF244321}">
-                <p14:modId xmlns:p14="http://schemas.microsoft.com/office/powerpoint/2010/main" val="567872134"/>
+                <p14:modId xmlns:p14="http://schemas.microsoft.com/office/powerpoint/2010/main" val="478953827"/>
               </p:ext>
             </p:extLst>
           </p:nvPr>
@@ -2459,13 +2382,23 @@
                     <a:p>
                       <a:pPr algn="ctr"/>
                       <a:r>
-                        <a:rPr lang="en-US" sz="4500" dirty="0">
-                          <a:latin typeface="+mn-lt"/>
+                        <a:rPr lang="en-US" sz="4500" b="1" kern="1200" dirty="0">
+                          <a:solidFill>
+                            <a:srgbClr val="002060"/>
+                          </a:solidFill>
+                          <a:latin typeface="+mn-lt"/>
+                          <a:ea typeface="+mn-ea"/>
+                          <a:cs typeface="+mn-cs"/>
                         </a:rPr>
                         <a:t>Analysis Method</a:t>
                       </a:r>
-                      <a:endParaRPr lang="en-BE" sz="4500" dirty="0">
+                      <a:endParaRPr lang="en-BE" sz="4500" b="1" kern="1200" dirty="0">
+                        <a:solidFill>
+                          <a:srgbClr val="002060"/>
+                        </a:solidFill>
                         <a:latin typeface="+mn-lt"/>
+                        <a:ea typeface="+mn-ea"/>
+                        <a:cs typeface="+mn-cs"/>
                       </a:endParaRPr>
                     </a:p>
                   </a:txBody>
@@ -2480,15 +2413,25 @@
                     <a:bodyPr/>
                     <a:lstStyle/>
                     <a:p>
-                      <a:pPr algn="ctr"/>
-                      <a:r>
-                        <a:rPr lang="en-US" sz="4500" dirty="0">
-                          <a:latin typeface="+mn-lt"/>
+                      <a:pPr marL="0" algn="ctr" defTabSz="873053" rtl="0" eaLnBrk="1" latinLnBrk="0" hangingPunct="1"/>
+                      <a:r>
+                        <a:rPr lang="en-US" sz="4500" b="1" kern="1200" dirty="0">
+                          <a:solidFill>
+                            <a:srgbClr val="002060"/>
+                          </a:solidFill>
+                          <a:latin typeface="+mn-lt"/>
+                          <a:ea typeface="+mn-ea"/>
+                          <a:cs typeface="+mn-cs"/>
                         </a:rPr>
                         <a:t>SAS</a:t>
                       </a:r>
-                      <a:endParaRPr lang="en-BE" sz="4500" dirty="0">
+                      <a:endParaRPr lang="en-BE" sz="4500" b="1" kern="1200" dirty="0">
+                        <a:solidFill>
+                          <a:srgbClr val="002060"/>
+                        </a:solidFill>
                         <a:latin typeface="+mn-lt"/>
+                        <a:ea typeface="+mn-ea"/>
+                        <a:cs typeface="+mn-cs"/>
                       </a:endParaRPr>
                     </a:p>
                   </a:txBody>
@@ -2503,15 +2446,25 @@
                     <a:bodyPr/>
                     <a:lstStyle/>
                     <a:p>
-                      <a:pPr algn="ctr"/>
-                      <a:r>
-                        <a:rPr lang="en-US" sz="4500" dirty="0">
-                          <a:latin typeface="+mn-lt"/>
+                      <a:pPr marL="0" algn="ctr" defTabSz="873053" rtl="0" eaLnBrk="1" latinLnBrk="0" hangingPunct="1"/>
+                      <a:r>
+                        <a:rPr lang="en-US" sz="4500" b="1" kern="1200" dirty="0">
+                          <a:solidFill>
+                            <a:srgbClr val="002060"/>
+                          </a:solidFill>
+                          <a:latin typeface="+mn-lt"/>
+                          <a:ea typeface="+mn-ea"/>
+                          <a:cs typeface="+mn-cs"/>
                         </a:rPr>
                         <a:t>R</a:t>
                       </a:r>
-                      <a:endParaRPr lang="en-BE" sz="4500" dirty="0">
+                      <a:endParaRPr lang="en-BE" sz="4500" b="1" kern="1200" dirty="0">
+                        <a:solidFill>
+                          <a:srgbClr val="002060"/>
+                        </a:solidFill>
                         <a:latin typeface="+mn-lt"/>
+                        <a:ea typeface="+mn-ea"/>
+                        <a:cs typeface="+mn-cs"/>
                       </a:endParaRPr>
                     </a:p>
                   </a:txBody>
@@ -2526,15 +2479,25 @@
                     <a:bodyPr/>
                     <a:lstStyle/>
                     <a:p>
-                      <a:pPr algn="ctr"/>
-                      <a:r>
-                        <a:rPr lang="en-US" sz="4500" dirty="0">
-                          <a:latin typeface="+mn-lt"/>
+                      <a:pPr marL="0" algn="ctr" defTabSz="873053" rtl="0" eaLnBrk="1" latinLnBrk="0" hangingPunct="1"/>
+                      <a:r>
+                        <a:rPr lang="en-US" sz="4500" b="1" kern="1200" dirty="0">
+                          <a:solidFill>
+                            <a:srgbClr val="002060"/>
+                          </a:solidFill>
+                          <a:latin typeface="+mn-lt"/>
+                          <a:ea typeface="+mn-ea"/>
+                          <a:cs typeface="+mn-cs"/>
                         </a:rPr>
                         <a:t>Similar!?</a:t>
                       </a:r>
-                      <a:endParaRPr lang="en-BE" sz="4500" dirty="0">
+                      <a:endParaRPr lang="en-BE" sz="4500" b="1" kern="1200" dirty="0">
+                        <a:solidFill>
+                          <a:srgbClr val="002060"/>
+                        </a:solidFill>
                         <a:latin typeface="+mn-lt"/>
+                        <a:ea typeface="+mn-ea"/>
+                        <a:cs typeface="+mn-cs"/>
                       </a:endParaRPr>
                     </a:p>
                   </a:txBody>
@@ -4616,7 +4579,7 @@
                           </a:solidFill>
                           <a:latin typeface="+mn-lt"/>
                         </a:rPr>
-                        <a:t>gee::gee </a:t>
+                        <a:t>gee::gee() </a:t>
                       </a:r>
                       <a:br>
                         <a:rPr lang="en-US" sz="3600" dirty="0">
@@ -5217,10 +5180,10 @@
             <p:nvPr/>
           </p:nvPicPr>
           <p:blipFill>
-            <a:blip r:embed="rId8">
+            <a:blip>
               <a:extLst>
                 <a:ext uri="{96DAC541-7B7A-43D3-8B79-37D633B846F1}">
-                  <asvg:svgBlip xmlns:asvg="http://schemas.microsoft.com/office/drawing/2016/SVG/main" r:embed="rId9"/>
+                  <asvg:svgBlip xmlns:asvg="http://schemas.microsoft.com/office/drawing/2016/SVG/main" r:embed="rId6"/>
                 </a:ext>
               </a:extLst>
             </a:blip>
@@ -5305,14 +5268,14 @@
           <p:nvPr/>
         </p:nvPicPr>
         <p:blipFill>
-          <a:blip r:embed="rId10"/>
+          <a:blip r:embed="rId7"/>
           <a:stretch>
             <a:fillRect/>
           </a:stretch>
         </p:blipFill>
         <p:spPr>
           <a:xfrm>
-            <a:off x="22094545" y="23507953"/>
+            <a:off x="22094545" y="23703895"/>
             <a:ext cx="7372947" cy="4506409"/>
           </a:xfrm>
           <a:prstGeom prst="rect">
@@ -5335,7 +5298,7 @@
           <p:nvPr/>
         </p:nvPicPr>
         <p:blipFill>
-          <a:blip r:embed="rId11"/>
+          <a:blip r:embed="rId8"/>
           <a:stretch>
             <a:fillRect/>
           </a:stretch>
@@ -5405,7 +5368,7 @@
           <p:nvPr/>
         </p:nvPicPr>
         <p:blipFill>
-          <a:blip r:embed="rId12"/>
+          <a:blip r:embed="rId9"/>
           <a:stretch>
             <a:fillRect/>
           </a:stretch>
@@ -5435,14 +5398,14 @@
           <p:nvPr/>
         </p:nvPicPr>
         <p:blipFill>
-          <a:blip r:embed="rId13"/>
+          <a:blip r:embed="rId10"/>
           <a:stretch>
             <a:fillRect/>
           </a:stretch>
         </p:blipFill>
         <p:spPr>
           <a:xfrm>
-            <a:off x="411764" y="20514873"/>
+            <a:off x="411764" y="20612844"/>
             <a:ext cx="4427604" cy="670618"/>
           </a:xfrm>
           <a:prstGeom prst="rect">
@@ -5465,14 +5428,14 @@
           <p:nvPr/>
         </p:nvPicPr>
         <p:blipFill>
-          <a:blip r:embed="rId14"/>
+          <a:blip r:embed="rId11"/>
           <a:stretch>
             <a:fillRect/>
           </a:stretch>
         </p:blipFill>
         <p:spPr>
           <a:xfrm>
-            <a:off x="411764" y="21185491"/>
+            <a:off x="411764" y="21283462"/>
             <a:ext cx="4427604" cy="2220982"/>
           </a:xfrm>
           <a:prstGeom prst="rect">
@@ -5494,10 +5457,10 @@
         </p:nvGrpSpPr>
         <p:grpSpPr>
           <a:xfrm>
-            <a:off x="147530" y="32021800"/>
-            <a:ext cx="5803996" cy="2875655"/>
-            <a:chOff x="152400" y="25572008"/>
-            <a:chExt cx="5803996" cy="2875655"/>
+            <a:off x="82215" y="31074747"/>
+            <a:ext cx="5869311" cy="2940969"/>
+            <a:chOff x="87085" y="25572008"/>
+            <a:chExt cx="5869311" cy="2940969"/>
           </a:xfrm>
         </p:grpSpPr>
         <p:sp>
@@ -6486,8 +6449,8 @@
           </p:nvSpPr>
           <p:spPr>
             <a:xfrm>
-              <a:off x="152400" y="27432000"/>
-              <a:ext cx="1372364" cy="1015663"/>
+              <a:off x="87085" y="27497314"/>
+              <a:ext cx="1537543" cy="1015663"/>
             </a:xfrm>
             <a:prstGeom prst="rect">
               <a:avLst/>
@@ -6502,9 +6465,9 @@
             <a:p>
               <a:pPr algn="l"/>
               <a:r>
-                <a:rPr lang="en-GB" sz="2200" dirty="0">
+                <a:rPr lang="en-GB" sz="2200" b="1" dirty="0">
                   <a:solidFill>
-                    <a:schemeClr val="bg1"/>
+                    <a:srgbClr val="002060"/>
                   </a:solidFill>
                 </a:rPr>
                 <a:t>Original</a:t>
@@ -6513,9 +6476,9 @@
             <a:p>
               <a:pPr algn="l"/>
               <a:r>
-                <a:rPr lang="en-GB" sz="2200" dirty="0">
+                <a:rPr lang="en-GB" sz="2200" b="1" dirty="0">
                   <a:solidFill>
-                    <a:schemeClr val="bg1"/>
+                    <a:srgbClr val="002060"/>
                   </a:solidFill>
                 </a:rPr>
                 <a:t>Incomplete Data</a:t>
@@ -6551,11 +6514,10 @@
             </a:bodyPr>
             <a:lstStyle/>
             <a:p>
-              <a:pPr algn="l"/>
               <a:r>
-                <a:rPr lang="en-GB" sz="2200" dirty="0">
+                <a:rPr lang="en-GB" sz="2200" b="1" dirty="0">
                   <a:solidFill>
-                    <a:schemeClr val="bg1"/>
+                    <a:srgbClr val="002060"/>
                   </a:solidFill>
                 </a:rPr>
                 <a:t>Imputed datasets</a:t>
@@ -6591,22 +6553,20 @@
             </a:bodyPr>
             <a:lstStyle/>
             <a:p>
-              <a:pPr algn="l"/>
               <a:r>
-                <a:rPr lang="en-GB" sz="2200" dirty="0">
+                <a:rPr lang="en-GB" sz="2200" b="1" dirty="0">
                   <a:solidFill>
-                    <a:schemeClr val="bg1"/>
+                    <a:srgbClr val="002060"/>
                   </a:solidFill>
                 </a:rPr>
                 <a:t>Analysis</a:t>
               </a:r>
             </a:p>
             <a:p>
-              <a:pPr algn="l"/>
               <a:r>
-                <a:rPr lang="en-GB" sz="2200" dirty="0">
+                <a:rPr lang="en-GB" sz="2200" b="1" dirty="0">
                   <a:solidFill>
-                    <a:schemeClr val="bg1"/>
+                    <a:srgbClr val="002060"/>
                   </a:solidFill>
                 </a:rPr>
                 <a:t>Results</a:t>
@@ -6642,22 +6602,20 @@
             </a:bodyPr>
             <a:lstStyle/>
             <a:p>
-              <a:pPr algn="l"/>
               <a:r>
-                <a:rPr lang="en-GB" sz="2200" dirty="0">
+                <a:rPr lang="en-GB" sz="2200" b="1" dirty="0">
                   <a:solidFill>
-                    <a:schemeClr val="bg1"/>
+                    <a:srgbClr val="002060"/>
                   </a:solidFill>
                 </a:rPr>
                 <a:t>Pooled</a:t>
               </a:r>
             </a:p>
             <a:p>
-              <a:pPr algn="l"/>
               <a:r>
-                <a:rPr lang="en-GB" sz="2200" dirty="0">
+                <a:rPr lang="en-GB" sz="2200" b="1" dirty="0">
                   <a:solidFill>
-                    <a:schemeClr val="bg1"/>
+                    <a:srgbClr val="002060"/>
                   </a:solidFill>
                 </a:rPr>
                 <a:t>Results</a:t>
@@ -7871,9 +7829,9 @@
               </a:spcBef>
             </a:pPr>
             <a:r>
-              <a:rPr lang="en-GB" sz="2200" dirty="0">
+              <a:rPr lang="en-GB" sz="2200" b="1" dirty="0">
                 <a:solidFill>
-                  <a:schemeClr val="bg1"/>
+                  <a:srgbClr val="002060"/>
                 </a:solidFill>
               </a:rPr>
               <a:t>Regression     +     modelling censored 	variables </a:t>
@@ -7916,10 +7874,10 @@
             <p:nvPr/>
           </p:nvPicPr>
           <p:blipFill>
-            <a:blip r:embed="rId15">
+            <a:blip>
               <a:extLst>
                 <a:ext uri="{96DAC541-7B7A-43D3-8B79-37D633B846F1}">
-                  <asvg:svgBlip xmlns:asvg="http://schemas.microsoft.com/office/drawing/2016/SVG/main" r:embed="rId16"/>
+                  <asvg:svgBlip xmlns:asvg="http://schemas.microsoft.com/office/drawing/2016/SVG/main" r:embed="rId12"/>
                 </a:ext>
               </a:extLst>
             </a:blip>
@@ -8613,7 +8571,7 @@
           <p:nvPr/>
         </p:nvPicPr>
         <p:blipFill>
-          <a:blip r:embed="rId17"/>
+          <a:blip r:embed="rId13"/>
           <a:stretch>
             <a:fillRect/>
           </a:stretch>
@@ -8643,7 +8601,7 @@
           <p:nvPr/>
         </p:nvPicPr>
         <p:blipFill>
-          <a:blip r:embed="rId18"/>
+          <a:blip r:embed="rId14"/>
           <a:stretch>
             <a:fillRect/>
           </a:stretch>
